--- a/Alfalah_Job_Career_Intelligent_AI_2026_V3.pptx
+++ b/Alfalah_Job_Career_Intelligent_AI_2026_V3.pptx
@@ -19,6 +19,7 @@
     <p:sldId id="267" r:id="rId19"/>
     <p:sldId id="268" r:id="rId20"/>
     <p:sldId id="269" r:id="rId21"/>
+    <p:sldId id="270" r:id="rId22"/>
   </p:sldIdLst>
   <p:sldSz cx="12188952" cy="6858000" type="screen4x3"/>
   <p:notesSz cx="6858000" cy="9144000"/>
@@ -1366,6 +1367,171 @@
           <a:p>
             <a:r>
               <a:t>[Pause. Smile. Let it land.]</a:t>
+            </a:r>
+          </a:p>
+          <a:p/>
+        </p:txBody>
+      </p:sp>
+      <p:sp>
+        <p:nvSpPr>
+          <p:cNvPr id="4" name="Slide Number Placeholder 3"/>
+          <p:cNvSpPr>
+            <a:spLocks noGrp="1"/>
+          </p:cNvSpPr>
+          <p:nvPr>
+            <p:ph type="sldNum" idx="5" sz="quarter"/>
+          </p:nvPr>
+        </p:nvSpPr>
+        <p:spPr/>
+      </p:sp>
+    </p:spTree>
+  </p:cSld>
+  <p:clrMapOvr>
+    <a:masterClrMapping/>
+  </p:clrMapOvr>
+</p:notes>
+</file>
+
+<file path=ppt/notesSlides/notesSlide15.xml><?xml version="1.0" encoding="utf-8"?>
+<p:notes xmlns:a="http://schemas.openxmlformats.org/drawingml/2006/main" xmlns:p="http://schemas.openxmlformats.org/presentationml/2006/main" xmlns:r="http://schemas.openxmlformats.org/officeDocument/2006/relationships">
+  <p:cSld>
+    <p:spTree>
+      <p:nvGrpSpPr>
+        <p:cNvPr id="1" name=""/>
+        <p:cNvGrpSpPr/>
+        <p:nvPr/>
+      </p:nvGrpSpPr>
+      <p:grpSpPr>
+        <a:xfrm>
+          <a:off x="0" y="0"/>
+          <a:ext cx="0" cy="0"/>
+          <a:chOff x="0" y="0"/>
+          <a:chExt cx="0" cy="0"/>
+        </a:xfrm>
+      </p:grpSpPr>
+      <p:sp>
+        <p:nvSpPr>
+          <p:cNvPr id="2" name="Slide Image Placeholder 1"/>
+          <p:cNvSpPr>
+            <a:spLocks noGrp="1"/>
+          </p:cNvSpPr>
+          <p:nvPr>
+            <p:ph type="sldImg" idx="2"/>
+          </p:nvPr>
+        </p:nvSpPr>
+        <p:spPr/>
+      </p:sp>
+      <p:sp>
+        <p:nvSpPr>
+          <p:cNvPr id="3" name="Notes Placeholder 2"/>
+          <p:cNvSpPr>
+            <a:spLocks noGrp="1"/>
+          </p:cNvSpPr>
+          <p:nvPr>
+            <p:ph type="body" idx="3" sz="quarter"/>
+          </p:nvPr>
+        </p:nvSpPr>
+        <p:spPr/>
+        <p:txBody>
+          <a:bodyPr/>
+          <a:lstStyle/>
+          <a:p>
+            <a:r>
+              <a:t>SPEAKER SCRIPT — SLIDE 15 — ARCHITECTURE DIAGRAM (60 seconds)</a:t>
+            </a:r>
+          </a:p>
+          <a:p/>
+          <a:p>
+            <a:r>
+              <a:t>This diagram shows the complete end-to-end architecture of Alfalah AI.</a:t>
+            </a:r>
+          </a:p>
+          <a:p/>
+          <a:p>
+            <a:r>
+              <a:t>Starting at the top — users from 195 countries access the platform through</a:t>
+            </a:r>
+          </a:p>
+          <a:p>
+            <a:r>
+              <a:t>any browser or as a Progressive Web App. No installation. No account.</a:t>
+            </a:r>
+          </a:p>
+          <a:p/>
+          <a:p>
+            <a:r>
+              <a:t>Their request hits Azure Static Web Apps — served from the nearest global CDN edge node.</a:t>
+            </a:r>
+          </a:p>
+          <a:p/>
+          <a:p>
+            <a:r>
+              <a:t>From there, Azure Functions v2 handles all six API routes —</a:t>
+            </a:r>
+          </a:p>
+          <a:p>
+            <a:r>
+              <a:t>career analysis, chat, jobs, location, health check, and file upload.</a:t>
+            </a:r>
+          </a:p>
+          <a:p/>
+          <a:p>
+            <a:r>
+              <a:t>The Functions connect to five Azure services:</a:t>
+            </a:r>
+          </a:p>
+          <a:p>
+            <a:r>
+              <a:t>Azure OpenAI for primary AI inference, Azure AI Search for semantic retrieval</a:t>
+            </a:r>
+          </a:p>
+          <a:p>
+            <a:r>
+              <a:t>from our knowledge base, Content Safety for output moderation,</a:t>
+            </a:r>
+          </a:p>
+          <a:p>
+            <a:r>
+              <a:t>Key Vault for secrets management, and Application Insights for monitoring.</a:t>
+            </a:r>
+          </a:p>
+          <a:p/>
+          <a:p>
+            <a:r>
+              <a:t>Below that is our AI fallback chain — 4 providers, 8 models —</a:t>
+            </a:r>
+          </a:p>
+          <a:p>
+            <a:r>
+              <a:t>so the platform never goes dark regardless of any single provider outage.</a:t>
+            </a:r>
+          </a:p>
+          <a:p/>
+          <a:p>
+            <a:r>
+              <a:t>The RAG knowledge engine holds 32 career files, 513 KB, 163 ISCO-08 occupations,</a:t>
+            </a:r>
+          </a:p>
+          <a:p>
+            <a:r>
+              <a:t>416 skills, 195 countries, and 16,544 lines of code and documentation.</a:t>
+            </a:r>
+          </a:p>
+          <a:p/>
+          <a:p>
+            <a:r>
+              <a:t>At the bottom right are the development tools that built this:</a:t>
+            </a:r>
+          </a:p>
+          <a:p>
+            <a:r>
+              <a:t>Claude Sonnet 4.6, Visual Studio Code, GitHub Actions, Azure CLI, and PowerShell.</a:t>
+            </a:r>
+          </a:p>
+          <a:p/>
+          <a:p>
+            <a:r>
+              <a:t>Everything. In one diagram.</a:t>
             </a:r>
           </a:p>
           <a:p/>
@@ -10981,6 +11147,167 @@
           </a:p>
         </p:txBody>
       </p:sp>
+    </p:spTree>
+  </p:cSld>
+  <p:clrMapOvr>
+    <a:masterClrMapping/>
+  </p:clrMapOvr>
+</p:sld>
+</file>
+
+<file path=ppt/slides/slide15.xml><?xml version="1.0" encoding="utf-8"?>
+<p:sld xmlns:a="http://schemas.openxmlformats.org/drawingml/2006/main" xmlns:p="http://schemas.openxmlformats.org/presentationml/2006/main" xmlns:r="http://schemas.openxmlformats.org/officeDocument/2006/relationships">
+  <p:cSld>
+    <p:bg>
+      <p:bgPr>
+        <a:solidFill>
+          <a:srgbClr val="0A0A1A"/>
+        </a:solidFill>
+        <a:effectLst/>
+      </p:bgPr>
+    </p:bg>
+    <p:spTree>
+      <p:nvGrpSpPr>
+        <p:cNvPr id="1" name=""/>
+        <p:cNvGrpSpPr/>
+        <p:nvPr/>
+      </p:nvGrpSpPr>
+      <p:grpSpPr/>
+      <p:sp>
+        <p:nvSpPr>
+          <p:cNvPr id="2" name="Rectangle 1"/>
+          <p:cNvSpPr/>
+          <p:nvPr/>
+        </p:nvSpPr>
+        <p:spPr>
+          <a:xfrm>
+            <a:off x="0" y="0"/>
+            <a:ext cx="12188952" cy="73152"/>
+          </a:xfrm>
+          <a:prstGeom prst="rect">
+            <a:avLst/>
+          </a:prstGeom>
+          <a:solidFill>
+            <a:srgbClr val="0078D4"/>
+          </a:solidFill>
+          <a:ln>
+            <a:noFill/>
+          </a:ln>
+        </p:spPr>
+        <p:style>
+          <a:lnRef idx="1">
+            <a:schemeClr val="accent1"/>
+          </a:lnRef>
+          <a:fillRef idx="3">
+            <a:schemeClr val="accent1"/>
+          </a:fillRef>
+          <a:effectRef idx="2">
+            <a:schemeClr val="accent1"/>
+          </a:effectRef>
+          <a:fontRef idx="minor">
+            <a:schemeClr val="lt1"/>
+          </a:fontRef>
+        </p:style>
+        <p:txBody>
+          <a:bodyPr rtlCol="0" anchor="ctr"/>
+          <a:lstStyle/>
+          <a:p>
+            <a:pPr algn="ctr"/>
+          </a:p>
+        </p:txBody>
+      </p:sp>
+      <p:sp>
+        <p:nvSpPr>
+          <p:cNvPr id="3" name="TextBox 2"/>
+          <p:cNvSpPr txBox="1"/>
+          <p:nvPr/>
+        </p:nvSpPr>
+        <p:spPr>
+          <a:xfrm>
+            <a:off x="457200" y="91440"/>
+            <a:ext cx="10972800" cy="457200"/>
+          </a:xfrm>
+          <a:prstGeom prst="rect">
+            <a:avLst/>
+          </a:prstGeom>
+          <a:noFill/>
+        </p:spPr>
+        <p:txBody>
+          <a:bodyPr wrap="square">
+            <a:spAutoFit/>
+          </a:bodyPr>
+          <a:lstStyle/>
+          <a:p>
+            <a:pPr algn="l"/>
+            <a:r>
+              <a:rPr sz="2000" b="1" i="0">
+                <a:solidFill>
+                  <a:srgbClr val="FFFFFF"/>
+                </a:solidFill>
+              </a:rPr>
+              <a:t>SYSTEM ARCHITECTURE — End-to-End</a:t>
+            </a:r>
+          </a:p>
+        </p:txBody>
+      </p:sp>
+      <p:sp>
+        <p:nvSpPr>
+          <p:cNvPr id="4" name="TextBox 3"/>
+          <p:cNvSpPr txBox="1"/>
+          <p:nvPr/>
+        </p:nvSpPr>
+        <p:spPr>
+          <a:xfrm>
+            <a:off x="457200" y="502920"/>
+            <a:ext cx="11247120" cy="320040"/>
+          </a:xfrm>
+          <a:prstGeom prst="rect">
+            <a:avLst/>
+          </a:prstGeom>
+          <a:noFill/>
+        </p:spPr>
+        <p:txBody>
+          <a:bodyPr wrap="square">
+            <a:spAutoFit/>
+          </a:bodyPr>
+          <a:lstStyle/>
+          <a:p>
+            <a:pPr algn="l"/>
+            <a:r>
+              <a:rPr sz="1100" b="0" i="0">
+                <a:solidFill>
+                  <a:srgbClr val="0078D4"/>
+                </a:solidFill>
+              </a:rPr>
+              <a:t>Alfalah Job Career Intelligent AI 2026 V3  ·  100% Microsoft Azure  ·  govrag-v3-func.azurewebsites.net</a:t>
+            </a:r>
+          </a:p>
+        </p:txBody>
+      </p:sp>
+      <p:pic>
+        <p:nvPicPr>
+          <p:cNvPr id="5" name="Picture 4" descr="architecture_diagram.png"/>
+          <p:cNvPicPr>
+            <a:picLocks noChangeAspect="1"/>
+          </p:cNvPicPr>
+          <p:nvPr/>
+        </p:nvPicPr>
+        <p:blipFill>
+          <a:blip r:embed="rId2"/>
+          <a:stretch>
+            <a:fillRect/>
+          </a:stretch>
+        </p:blipFill>
+        <p:spPr>
+          <a:xfrm>
+            <a:off x="137160" y="914400"/>
+            <a:ext cx="11887200" cy="5760720"/>
+          </a:xfrm>
+          <a:prstGeom prst="rect">
+            <a:avLst/>
+          </a:prstGeom>
+        </p:spPr>
+      </p:pic>
     </p:spTree>
   </p:cSld>
   <p:clrMapOvr>
